--- a/docs/Tedlar-Lead-Agent.pptx
+++ b/docs/Tedlar-Lead-Agent.pptx
@@ -2152,7 +2152,7 @@
                 <a:ea typeface="Cambria" pitchFamily="34" charset="-122"/>
                 <a:cs typeface="Cambria" pitchFamily="34" charset="-120"/>
               </a:rPr>
-              <a:t>54</a:t>
+              <a:t>98</a:t>
             </a:r>
             <a:endParaRPr lang="en-US" sz="4400" dirty="0"/>
           </a:p>
@@ -2230,7 +2230,7 @@
                 <a:ea typeface="Cambria" pitchFamily="34" charset="-122"/>
                 <a:cs typeface="Cambria" pitchFamily="34" charset="-120"/>
               </a:rPr>
-              <a:t>87</a:t>
+              <a:t>128</a:t>
             </a:r>
             <a:endParaRPr lang="en-US" sz="4400" dirty="0"/>
           </a:p>
@@ -6948,7 +6948,7 @@
                 <a:ea typeface="Cambria" pitchFamily="34" charset="-122"/>
                 <a:cs typeface="Cambria" pitchFamily="34" charset="-120"/>
               </a:rPr>
-              <a:t>54</a:t>
+              <a:t>98</a:t>
             </a:r>
             <a:endParaRPr lang="en-US" sz="4000" dirty="0"/>
           </a:p>
@@ -7048,7 +7048,7 @@
                 <a:ea typeface="Cambria" pitchFamily="34" charset="-122"/>
                 <a:cs typeface="Cambria" pitchFamily="34" charset="-120"/>
               </a:rPr>
-              <a:t>47</a:t>
+              <a:t>91</a:t>
             </a:r>
             <a:endParaRPr lang="en-US" sz="4000" dirty="0"/>
           </a:p>
@@ -7148,7 +7148,7 @@
                 <a:ea typeface="Cambria" pitchFamily="34" charset="-122"/>
                 <a:cs typeface="Cambria" pitchFamily="34" charset="-120"/>
               </a:rPr>
-              <a:t>10</a:t>
+              <a:t>11</a:t>
             </a:r>
             <a:endParaRPr lang="en-US" sz="4000" dirty="0"/>
           </a:p>
@@ -7248,7 +7248,7 @@
                 <a:ea typeface="Cambria" pitchFamily="34" charset="-122"/>
                 <a:cs typeface="Cambria" pitchFamily="34" charset="-120"/>
               </a:rPr>
-              <a:t>87</a:t>
+              <a:t>128</a:t>
             </a:r>
             <a:endParaRPr lang="en-US" sz="4000" dirty="0"/>
           </a:p>
@@ -7469,23 +7469,23 @@
         <p:spPr>
           <a:xfrm>
             <a:off x="960120" y="5532120"/>
-            <a:ext cx="10241280" cy="548640"/>
-          </a:xfrm>
-          <a:prstGeom prst="rect">
-            <a:avLst/>
-          </a:prstGeom>
-          <a:noFill/>
-          <a:ln/>
-        </p:spPr>
-        <p:txBody>
-          <a:bodyPr wrap="square" lIns="0" tIns="0" rIns="0" bIns="0" rtlCol="0" anchor="ctr"/>
-          <a:lstStyle/>
-          <a:p>
-            <a:pPr indent="0" marL="0">
-              <a:buNone/>
-            </a:pPr>
-            <a:r>
-              <a:rPr lang="en-US" sz="1300" dirty="0">
+            <a:ext cx="10241280" cy="640080"/>
+          </a:xfrm>
+          <a:prstGeom prst="rect">
+            <a:avLst/>
+          </a:prstGeom>
+          <a:noFill/>
+          <a:ln/>
+        </p:spPr>
+        <p:txBody>
+          <a:bodyPr wrap="square" lIns="0" tIns="0" rIns="0" bIns="0" rtlCol="0" anchor="ctr"/>
+          <a:lstStyle/>
+          <a:p>
+            <a:pPr indent="0" marL="0">
+              <a:buNone/>
+            </a:pPr>
+            <a:r>
+              <a:rPr lang="en-US" sz="1250" dirty="0">
                 <a:solidFill>
                   <a:srgbClr val="0B1F26"/>
                 </a:solidFill>
@@ -7493,9 +7493,9 @@
                 <a:ea typeface="Calibri" pitchFamily="34" charset="-122"/>
                 <a:cs typeface="Calibri" pitchFamily="34" charset="-120"/>
               </a:rPr>
-              <a:t>Runs clean with no API keys at all. Two keys — Anthropic and a search provider — turn keyword fallbacks into model-read enrichment and real search recall.</a:t>
-            </a:r>
-            <a:endParaRPr lang="en-US" sz="1300" dirty="0"/>
+              <a:t>Last run: 108 LLM calls, $0.59 total, $0.10 per qualified lead. Runs clean with no API keys at all; each provider has a deterministic fallback, and `app.preflight` verifies every key before a run spends one.</a:t>
+            </a:r>
+            <a:endParaRPr lang="en-US" sz="1250" dirty="0"/>
           </a:p>
         </p:txBody>
       </p:sp>

--- a/docs/Tedlar-Lead-Agent.pptx
+++ b/docs/Tedlar-Lead-Agent.pptx
@@ -2152,7 +2152,7 @@
                 <a:ea typeface="Cambria" pitchFamily="34" charset="-122"/>
                 <a:cs typeface="Cambria" pitchFamily="34" charset="-120"/>
               </a:rPr>
-              <a:t>98</a:t>
+              <a:t>94</a:t>
             </a:r>
             <a:endParaRPr lang="en-US" sz="4400" dirty="0"/>
           </a:p>
@@ -6948,7 +6948,7 @@
                 <a:ea typeface="Cambria" pitchFamily="34" charset="-122"/>
                 <a:cs typeface="Cambria" pitchFamily="34" charset="-120"/>
               </a:rPr>
-              <a:t>98</a:t>
+              <a:t>94</a:t>
             </a:r>
             <a:endParaRPr lang="en-US" sz="4000" dirty="0"/>
           </a:p>
@@ -7048,7 +7048,7 @@
                 <a:ea typeface="Cambria" pitchFamily="34" charset="-122"/>
                 <a:cs typeface="Cambria" pitchFamily="34" charset="-120"/>
               </a:rPr>
-              <a:t>91</a:t>
+              <a:t>88</a:t>
             </a:r>
             <a:endParaRPr lang="en-US" sz="4000" dirty="0"/>
           </a:p>
@@ -7493,7 +7493,7 @@
                 <a:ea typeface="Calibri" pitchFamily="34" charset="-122"/>
                 <a:cs typeface="Calibri" pitchFamily="34" charset="-120"/>
               </a:rPr>
-              <a:t>Last run: 108 LLM calls, $0.59 total, $0.10 per qualified lead. Runs clean with no API keys at all; each provider has a deterministic fallback, and `app.preflight` verifies every key before a run spends one.</a:t>
+              <a:t>Last run: 102 LLM calls, $0.55 total, $0.11 per qualified lead. Runs clean with no API keys at all; each provider has a deterministic fallback, and `app.preflight` verifies every key before a run spends one.</a:t>
             </a:r>
             <a:endParaRPr lang="en-US" sz="1250" dirty="0"/>
           </a:p>

--- a/docs/Tedlar-Lead-Agent.pptx
+++ b/docs/Tedlar-Lead-Agent.pptx
@@ -2152,7 +2152,7 @@
                 <a:ea typeface="Cambria" pitchFamily="34" charset="-122"/>
                 <a:cs typeface="Cambria" pitchFamily="34" charset="-120"/>
               </a:rPr>
-              <a:t>94</a:t>
+              <a:t>89</a:t>
             </a:r>
             <a:endParaRPr lang="en-US" sz="4400" dirty="0"/>
           </a:p>
@@ -2230,7 +2230,7 @@
                 <a:ea typeface="Cambria" pitchFamily="34" charset="-122"/>
                 <a:cs typeface="Cambria" pitchFamily="34" charset="-120"/>
               </a:rPr>
-              <a:t>128</a:t>
+              <a:t>146</a:t>
             </a:r>
             <a:endParaRPr lang="en-US" sz="4400" dirty="0"/>
           </a:p>
@@ -6948,7 +6948,7 @@
                 <a:ea typeface="Cambria" pitchFamily="34" charset="-122"/>
                 <a:cs typeface="Cambria" pitchFamily="34" charset="-120"/>
               </a:rPr>
-              <a:t>94</a:t>
+              <a:t>89</a:t>
             </a:r>
             <a:endParaRPr lang="en-US" sz="4000" dirty="0"/>
           </a:p>
@@ -7048,7 +7048,7 @@
                 <a:ea typeface="Cambria" pitchFamily="34" charset="-122"/>
                 <a:cs typeface="Cambria" pitchFamily="34" charset="-120"/>
               </a:rPr>
-              <a:t>88</a:t>
+              <a:t>83</a:t>
             </a:r>
             <a:endParaRPr lang="en-US" sz="4000" dirty="0"/>
           </a:p>
@@ -7248,7 +7248,7 @@
                 <a:ea typeface="Cambria" pitchFamily="34" charset="-122"/>
                 <a:cs typeface="Cambria" pitchFamily="34" charset="-120"/>
               </a:rPr>
-              <a:t>128</a:t>
+              <a:t>146</a:t>
             </a:r>
             <a:endParaRPr lang="en-US" sz="4000" dirty="0"/>
           </a:p>
@@ -7493,7 +7493,7 @@
                 <a:ea typeface="Calibri" pitchFamily="34" charset="-122"/>
                 <a:cs typeface="Calibri" pitchFamily="34" charset="-120"/>
               </a:rPr>
-              <a:t>Last run: 102 LLM calls, $0.55 total, $0.11 per qualified lead. Runs clean with no API keys at all; each provider has a deterministic fallback, and `app.preflight` verifies every key before a run spends one.</a:t>
+              <a:t>Last run: 96 LLM calls, $0.54 total, $0.09 per qualified lead. Runs clean with no API keys at all; each provider has a deterministic fallback, and `app.preflight` verifies every key before a run spends one.</a:t>
             </a:r>
             <a:endParaRPr lang="en-US" sz="1250" dirty="0"/>
           </a:p>

--- a/docs/Tedlar-Lead-Agent.pptx
+++ b/docs/Tedlar-Lead-Agent.pptx
@@ -2152,7 +2152,7 @@
                 <a:ea typeface="Cambria" pitchFamily="34" charset="-122"/>
                 <a:cs typeface="Cambria" pitchFamily="34" charset="-120"/>
               </a:rPr>
-              <a:t>89</a:t>
+              <a:t>95</a:t>
             </a:r>
             <a:endParaRPr lang="en-US" sz="4400" dirty="0"/>
           </a:p>
@@ -2230,7 +2230,7 @@
                 <a:ea typeface="Cambria" pitchFamily="34" charset="-122"/>
                 <a:cs typeface="Cambria" pitchFamily="34" charset="-120"/>
               </a:rPr>
-              <a:t>146</a:t>
+              <a:t>165</a:t>
             </a:r>
             <a:endParaRPr lang="en-US" sz="4400" dirty="0"/>
           </a:p>
@@ -6948,7 +6948,7 @@
                 <a:ea typeface="Cambria" pitchFamily="34" charset="-122"/>
                 <a:cs typeface="Cambria" pitchFamily="34" charset="-120"/>
               </a:rPr>
-              <a:t>89</a:t>
+              <a:t>95</a:t>
             </a:r>
             <a:endParaRPr lang="en-US" sz="4000" dirty="0"/>
           </a:p>
@@ -7048,7 +7048,7 @@
                 <a:ea typeface="Cambria" pitchFamily="34" charset="-122"/>
                 <a:cs typeface="Cambria" pitchFamily="34" charset="-120"/>
               </a:rPr>
-              <a:t>83</a:t>
+              <a:t>89</a:t>
             </a:r>
             <a:endParaRPr lang="en-US" sz="4000" dirty="0"/>
           </a:p>
@@ -7148,7 +7148,7 @@
                 <a:ea typeface="Cambria" pitchFamily="34" charset="-122"/>
                 <a:cs typeface="Cambria" pitchFamily="34" charset="-120"/>
               </a:rPr>
-              <a:t>11</a:t>
+              <a:t>10</a:t>
             </a:r>
             <a:endParaRPr lang="en-US" sz="4000" dirty="0"/>
           </a:p>
@@ -7248,7 +7248,7 @@
                 <a:ea typeface="Cambria" pitchFamily="34" charset="-122"/>
                 <a:cs typeface="Cambria" pitchFamily="34" charset="-120"/>
               </a:rPr>
-              <a:t>146</a:t>
+              <a:t>165</a:t>
             </a:r>
             <a:endParaRPr lang="en-US" sz="4000" dirty="0"/>
           </a:p>
@@ -7493,7 +7493,7 @@
                 <a:ea typeface="Calibri" pitchFamily="34" charset="-122"/>
                 <a:cs typeface="Calibri" pitchFamily="34" charset="-120"/>
               </a:rPr>
-              <a:t>Last run: 96 LLM calls, $0.54 total, $0.09 per qualified lead. Runs clean with no API keys at all; each provider has a deterministic fallback, and `app.preflight` verifies every key before a run spends one.</a:t>
+              <a:t>Last run: 129 LLM calls, $0.85 total, $0.05 per qualified lead. Runs clean with no API keys at all; each provider has a deterministic fallback, and `app.preflight` verifies every key before a run spends one.</a:t>
             </a:r>
             <a:endParaRPr lang="en-US" sz="1250" dirty="0"/>
           </a:p>

--- a/docs/Tedlar-Lead-Agent.pptx
+++ b/docs/Tedlar-Lead-Agent.pptx
@@ -2152,7 +2152,7 @@
                 <a:ea typeface="Cambria" pitchFamily="34" charset="-122"/>
                 <a:cs typeface="Cambria" pitchFamily="34" charset="-120"/>
               </a:rPr>
-              <a:t>95</a:t>
+              <a:t>97</a:t>
             </a:r>
             <a:endParaRPr lang="en-US" sz="4400" dirty="0"/>
           </a:p>
@@ -6948,7 +6948,7 @@
                 <a:ea typeface="Cambria" pitchFamily="34" charset="-122"/>
                 <a:cs typeface="Cambria" pitchFamily="34" charset="-120"/>
               </a:rPr>
-              <a:t>95</a:t>
+              <a:t>97</a:t>
             </a:r>
             <a:endParaRPr lang="en-US" sz="4000" dirty="0"/>
           </a:p>
@@ -7048,7 +7048,7 @@
                 <a:ea typeface="Cambria" pitchFamily="34" charset="-122"/>
                 <a:cs typeface="Cambria" pitchFamily="34" charset="-120"/>
               </a:rPr>
-              <a:t>89</a:t>
+              <a:t>90</a:t>
             </a:r>
             <a:endParaRPr lang="en-US" sz="4000" dirty="0"/>
           </a:p>
@@ -7493,7 +7493,7 @@
                 <a:ea typeface="Calibri" pitchFamily="34" charset="-122"/>
                 <a:cs typeface="Calibri" pitchFamily="34" charset="-120"/>
               </a:rPr>
-              <a:t>Last run: 129 LLM calls, $0.85 total, $0.05 per qualified lead. Runs clean with no API keys at all; each provider has a deterministic fallback, and `app.preflight` verifies every key before a run spends one.</a:t>
+              <a:t>Last run: 108 LLM calls, $0.63 total, $0.04 per qualified lead. Runs clean with no API keys at all; each provider has a deterministic fallback, and `app.preflight` verifies every key before a run spends one.</a:t>
             </a:r>
             <a:endParaRPr lang="en-US" sz="1250" dirty="0"/>
           </a:p>

--- a/docs/Tedlar-Lead-Agent.pptx
+++ b/docs/Tedlar-Lead-Agent.pptx
@@ -3005,7 +3005,7 @@
                 <a:ea typeface="Cambria" pitchFamily="34" charset="-122"/>
                 <a:cs typeface="Cambria" pitchFamily="34" charset="-120"/>
               </a:rPr>
-              <a:t>Seven stages, each isolating its own failures</a:t>
+              <a:t>Six stages, each isolating its own failures</a:t>
             </a:r>
             <a:endParaRPr lang="en-US" sz="3400" dirty="0"/>
           </a:p>
@@ -6102,7 +6102,7 @@
                 <a:ea typeface="Cambria" pitchFamily="34" charset="-122"/>
                 <a:cs typeface="Cambria" pitchFamily="34" charset="-120"/>
               </a:rPr>
-              <a:t>Contact enrichment is one interface, four providers</a:t>
+              <a:t>Contact enrichment is one interface, five providers</a:t>
             </a:r>
             <a:endParaRPr lang="en-US" sz="3400" dirty="0"/>
           </a:p>
@@ -6116,12 +6116,12 @@
         </p:nvSpPr>
         <p:spPr>
           <a:xfrm>
-            <a:off x="640080" y="1627632"/>
-            <a:ext cx="10881360" cy="932688"/>
+            <a:off x="640080" y="1572768"/>
+            <a:ext cx="10881360" cy="822960"/>
           </a:xfrm>
           <a:prstGeom prst="roundRect">
             <a:avLst>
-              <a:gd name="adj" fmla="val 7843"/>
+              <a:gd name="adj" fmla="val 8889"/>
             </a:avLst>
           </a:prstGeom>
           <a:solidFill>
@@ -6138,7 +6138,166 @@
         </p:nvSpPr>
         <p:spPr>
           <a:xfrm>
-            <a:off x="932688" y="2011680"/>
+            <a:off x="932688" y="1901952"/>
+            <a:ext cx="164592" cy="164592"/>
+          </a:xfrm>
+          <a:prstGeom prst="ellipse">
+            <a:avLst/>
+          </a:prstGeom>
+          <a:solidFill>
+            <a:srgbClr val="E8A33D"/>
+          </a:solidFill>
+          <a:ln/>
+        </p:spPr>
+      </p:sp>
+      <p:sp>
+        <p:nvSpPr>
+          <p:cNvPr id="6" name="Text 4"/>
+          <p:cNvSpPr/>
+          <p:nvPr/>
+        </p:nvSpPr>
+        <p:spPr>
+          <a:xfrm>
+            <a:off x="1261872" y="1664208"/>
+            <a:ext cx="3383280" cy="292608"/>
+          </a:xfrm>
+          <a:prstGeom prst="rect">
+            <a:avLst/>
+          </a:prstGeom>
+          <a:noFill/>
+          <a:ln/>
+        </p:spPr>
+        <p:txBody>
+          <a:bodyPr wrap="square" lIns="0" tIns="0" rIns="0" bIns="0" rtlCol="0" anchor="ctr"/>
+          <a:lstStyle/>
+          <a:p>
+            <a:pPr indent="0" marL="0">
+              <a:buNone/>
+            </a:pPr>
+            <a:r>
+              <a:rPr lang="en-US" sz="1400" b="1" dirty="0">
+                <a:solidFill>
+                  <a:srgbClr val="0B3C49"/>
+                </a:solidFill>
+                <a:latin typeface="Calibri" pitchFamily="34" charset="0"/>
+                <a:ea typeface="Calibri" pitchFamily="34" charset="-122"/>
+                <a:cs typeface="Calibri" pitchFamily="34" charset="-120"/>
+              </a:rPr>
+              <a:t>ApolloProvider</a:t>
+            </a:r>
+            <a:endParaRPr lang="en-US" sz="1400" dirty="0"/>
+          </a:p>
+        </p:txBody>
+      </p:sp>
+      <p:sp>
+        <p:nvSpPr>
+          <p:cNvPr id="7" name="Text 5"/>
+          <p:cNvSpPr/>
+          <p:nvPr/>
+        </p:nvSpPr>
+        <p:spPr>
+          <a:xfrm>
+            <a:off x="1261872" y="1975104"/>
+            <a:ext cx="3383280" cy="274320"/>
+          </a:xfrm>
+          <a:prstGeom prst="rect">
+            <a:avLst/>
+          </a:prstGeom>
+          <a:noFill/>
+          <a:ln/>
+        </p:spPr>
+        <p:txBody>
+          <a:bodyPr wrap="square" lIns="0" tIns="0" rIns="0" bIns="0" rtlCol="0" anchor="ctr"/>
+          <a:lstStyle/>
+          <a:p>
+            <a:pPr indent="0" marL="0">
+              <a:buNone/>
+            </a:pPr>
+            <a:r>
+              <a:rPr lang="en-US" sz="1100" i="1" dirty="0">
+                <a:solidFill>
+                  <a:srgbClr val="5C7480"/>
+                </a:solidFill>
+                <a:latin typeface="Calibri" pitchFamily="34" charset="0"/>
+                <a:ea typeface="Calibri" pitchFamily="34" charset="-122"/>
+                <a:cs typeface="Calibri" pitchFamily="34" charset="-120"/>
+              </a:rPr>
+              <a:t>Working (org endpoint)</a:t>
+            </a:r>
+            <a:endParaRPr lang="en-US" sz="1100" dirty="0"/>
+          </a:p>
+        </p:txBody>
+      </p:sp>
+      <p:sp>
+        <p:nvSpPr>
+          <p:cNvPr id="8" name="Text 6"/>
+          <p:cNvSpPr/>
+          <p:nvPr/>
+        </p:nvSpPr>
+        <p:spPr>
+          <a:xfrm>
+            <a:off x="4846320" y="1673352"/>
+            <a:ext cx="6309360" cy="640080"/>
+          </a:xfrm>
+          <a:prstGeom prst="rect">
+            <a:avLst/>
+          </a:prstGeom>
+          <a:noFill/>
+          <a:ln/>
+        </p:spPr>
+        <p:txBody>
+          <a:bodyPr wrap="square" lIns="0" tIns="0" rIns="0" bIns="0" rtlCol="0" anchor="ctr"/>
+          <a:lstStyle/>
+          <a:p>
+            <a:pPr indent="0" marL="0">
+              <a:buNone/>
+            </a:pPr>
+            <a:r>
+              <a:rPr lang="en-US" sz="1200" dirty="0">
+                <a:solidFill>
+                  <a:srgbClr val="0B1F26"/>
+                </a:solidFill>
+                <a:latin typeface="Calibri" pitchFamily="34" charset="0"/>
+                <a:ea typeface="Calibri" pitchFamily="34" charset="-122"/>
+                <a:cs typeface="Calibri" pitchFamily="34" charset="-120"/>
+              </a:rPr>
+              <a:t>Firmographics resolve against the live API. People search is gated on the free tier, so no email is ever guessed — the run degrades to search snippets.</a:t>
+            </a:r>
+            <a:endParaRPr lang="en-US" sz="1200" dirty="0"/>
+          </a:p>
+        </p:txBody>
+      </p:sp>
+      <p:sp>
+        <p:nvSpPr>
+          <p:cNvPr id="9" name="Shape 7"/>
+          <p:cNvSpPr/>
+          <p:nvPr/>
+        </p:nvSpPr>
+        <p:spPr>
+          <a:xfrm>
+            <a:off x="640080" y="2505456"/>
+            <a:ext cx="10881360" cy="822960"/>
+          </a:xfrm>
+          <a:prstGeom prst="roundRect">
+            <a:avLst>
+              <a:gd name="adj" fmla="val 8889"/>
+            </a:avLst>
+          </a:prstGeom>
+          <a:solidFill>
+            <a:srgbClr val="EEF3F5"/>
+          </a:solidFill>
+          <a:ln/>
+        </p:spPr>
+      </p:sp>
+      <p:sp>
+        <p:nvSpPr>
+          <p:cNvPr id="10" name="Shape 8"/>
+          <p:cNvSpPr/>
+          <p:nvPr/>
+        </p:nvSpPr>
+        <p:spPr>
+          <a:xfrm>
+            <a:off x="932688" y="2834640"/>
             <a:ext cx="164592" cy="164592"/>
           </a:xfrm>
           <a:prstGeom prst="ellipse">
@@ -6152,14 +6311,14 @@
       </p:sp>
       <p:sp>
         <p:nvSpPr>
-          <p:cNvPr id="6" name="Text 4"/>
-          <p:cNvSpPr/>
-          <p:nvPr/>
-        </p:nvSpPr>
-        <p:spPr>
-          <a:xfrm>
-            <a:off x="1261872" y="1755648"/>
-            <a:ext cx="3383280" cy="310896"/>
+          <p:cNvPr id="11" name="Text 9"/>
+          <p:cNvSpPr/>
+          <p:nvPr/>
+        </p:nvSpPr>
+        <p:spPr>
+          <a:xfrm>
+            <a:off x="1261872" y="2596896"/>
+            <a:ext cx="3383280" cy="292608"/>
           </a:xfrm>
           <a:prstGeom prst="rect">
             <a:avLst/>
@@ -6191,13 +6350,13 @@
       </p:sp>
       <p:sp>
         <p:nvSpPr>
-          <p:cNvPr id="7" name="Text 5"/>
-          <p:cNvSpPr/>
-          <p:nvPr/>
-        </p:nvSpPr>
-        <p:spPr>
-          <a:xfrm>
-            <a:off x="1261872" y="2084832"/>
+          <p:cNvPr id="12" name="Text 10"/>
+          <p:cNvSpPr/>
+          <p:nvPr/>
+        </p:nvSpPr>
+        <p:spPr>
+          <a:xfrm>
+            <a:off x="1261872" y="2907792"/>
             <a:ext cx="3383280" cy="274320"/>
           </a:xfrm>
           <a:prstGeom prst="rect">
@@ -6230,14 +6389,14 @@
       </p:sp>
       <p:sp>
         <p:nvSpPr>
-          <p:cNvPr id="8" name="Text 6"/>
-          <p:cNvSpPr/>
-          <p:nvPr/>
-        </p:nvSpPr>
-        <p:spPr>
-          <a:xfrm>
-            <a:off x="4846320" y="1773936"/>
-            <a:ext cx="6309360" cy="685800"/>
+          <p:cNvPr id="13" name="Text 11"/>
+          <p:cNvSpPr/>
+          <p:nvPr/>
+        </p:nvSpPr>
+        <p:spPr>
+          <a:xfrm>
+            <a:off x="4846320" y="2606040"/>
+            <a:ext cx="6309360" cy="640080"/>
           </a:xfrm>
           <a:prstGeom prst="rect">
             <a:avLst/>
@@ -6269,18 +6428,18 @@
       </p:sp>
       <p:sp>
         <p:nvSpPr>
-          <p:cNvPr id="9" name="Shape 7"/>
-          <p:cNvSpPr/>
-          <p:nvPr/>
-        </p:nvSpPr>
-        <p:spPr>
-          <a:xfrm>
-            <a:off x="640080" y="2688336"/>
-            <a:ext cx="10881360" cy="932688"/>
+          <p:cNvPr id="14" name="Shape 12"/>
+          <p:cNvSpPr/>
+          <p:nvPr/>
+        </p:nvSpPr>
+        <p:spPr>
+          <a:xfrm>
+            <a:off x="640080" y="3438144"/>
+            <a:ext cx="10881360" cy="822960"/>
           </a:xfrm>
           <a:prstGeom prst="roundRect">
             <a:avLst>
-              <a:gd name="adj" fmla="val 7843"/>
+              <a:gd name="adj" fmla="val 8889"/>
             </a:avLst>
           </a:prstGeom>
           <a:solidFill>
@@ -6291,13 +6450,13 @@
       </p:sp>
       <p:sp>
         <p:nvSpPr>
-          <p:cNvPr id="10" name="Shape 8"/>
-          <p:cNvSpPr/>
-          <p:nvPr/>
-        </p:nvSpPr>
-        <p:spPr>
-          <a:xfrm>
-            <a:off x="932688" y="3072384"/>
+          <p:cNvPr id="15" name="Shape 13"/>
+          <p:cNvSpPr/>
+          <p:nvPr/>
+        </p:nvSpPr>
+        <p:spPr>
+          <a:xfrm>
+            <a:off x="932688" y="3767328"/>
             <a:ext cx="164592" cy="164592"/>
           </a:xfrm>
           <a:prstGeom prst="ellipse">
@@ -6311,14 +6470,14 @@
       </p:sp>
       <p:sp>
         <p:nvSpPr>
-          <p:cNvPr id="11" name="Text 9"/>
-          <p:cNvSpPr/>
-          <p:nvPr/>
-        </p:nvSpPr>
-        <p:spPr>
-          <a:xfrm>
-            <a:off x="1261872" y="2816352"/>
-            <a:ext cx="3383280" cy="310896"/>
+          <p:cNvPr id="16" name="Text 14"/>
+          <p:cNvSpPr/>
+          <p:nvPr/>
+        </p:nvSpPr>
+        <p:spPr>
+          <a:xfrm>
+            <a:off x="1261872" y="3529584"/>
+            <a:ext cx="3383280" cy="292608"/>
           </a:xfrm>
           <a:prstGeom prst="rect">
             <a:avLst/>
@@ -6350,13 +6509,13 @@
       </p:sp>
       <p:sp>
         <p:nvSpPr>
-          <p:cNvPr id="12" name="Text 10"/>
-          <p:cNvSpPr/>
-          <p:nvPr/>
-        </p:nvSpPr>
-        <p:spPr>
-          <a:xfrm>
-            <a:off x="1261872" y="3145536"/>
+          <p:cNvPr id="17" name="Text 15"/>
+          <p:cNvSpPr/>
+          <p:nvPr/>
+        </p:nvSpPr>
+        <p:spPr>
+          <a:xfrm>
+            <a:off x="1261872" y="3840480"/>
             <a:ext cx="3383280" cy="274320"/>
           </a:xfrm>
           <a:prstGeom prst="rect">
@@ -6389,14 +6548,14 @@
       </p:sp>
       <p:sp>
         <p:nvSpPr>
-          <p:cNvPr id="13" name="Text 11"/>
-          <p:cNvSpPr/>
-          <p:nvPr/>
-        </p:nvSpPr>
-        <p:spPr>
-          <a:xfrm>
-            <a:off x="4846320" y="2834640"/>
-            <a:ext cx="6309360" cy="685800"/>
+          <p:cNvPr id="18" name="Text 16"/>
+          <p:cNvSpPr/>
+          <p:nvPr/>
+        </p:nvSpPr>
+        <p:spPr>
+          <a:xfrm>
+            <a:off x="4846320" y="3538728"/>
+            <a:ext cx="6309360" cy="640080"/>
           </a:xfrm>
           <a:prstGeom prst="rect">
             <a:avLst/>
@@ -6428,18 +6587,18 @@
       </p:sp>
       <p:sp>
         <p:nvSpPr>
-          <p:cNvPr id="14" name="Shape 12"/>
-          <p:cNvSpPr/>
-          <p:nvPr/>
-        </p:nvSpPr>
-        <p:spPr>
-          <a:xfrm>
-            <a:off x="640080" y="3749040"/>
-            <a:ext cx="10881360" cy="932688"/>
+          <p:cNvPr id="19" name="Shape 17"/>
+          <p:cNvSpPr/>
+          <p:nvPr/>
+        </p:nvSpPr>
+        <p:spPr>
+          <a:xfrm>
+            <a:off x="640080" y="4370832"/>
+            <a:ext cx="10881360" cy="822960"/>
           </a:xfrm>
           <a:prstGeom prst="roundRect">
             <a:avLst>
-              <a:gd name="adj" fmla="val 7843"/>
+              <a:gd name="adj" fmla="val 8889"/>
             </a:avLst>
           </a:prstGeom>
           <a:solidFill>
@@ -6450,13 +6609,13 @@
       </p:sp>
       <p:sp>
         <p:nvSpPr>
-          <p:cNvPr id="15" name="Shape 13"/>
-          <p:cNvSpPr/>
-          <p:nvPr/>
-        </p:nvSpPr>
-        <p:spPr>
-          <a:xfrm>
-            <a:off x="932688" y="4133088"/>
+          <p:cNvPr id="20" name="Shape 18"/>
+          <p:cNvSpPr/>
+          <p:nvPr/>
+        </p:nvSpPr>
+        <p:spPr>
+          <a:xfrm>
+            <a:off x="932688" y="4700016"/>
             <a:ext cx="164592" cy="164592"/>
           </a:xfrm>
           <a:prstGeom prst="ellipse">
@@ -6470,14 +6629,14 @@
       </p:sp>
       <p:sp>
         <p:nvSpPr>
-          <p:cNvPr id="16" name="Text 14"/>
-          <p:cNvSpPr/>
-          <p:nvPr/>
-        </p:nvSpPr>
-        <p:spPr>
-          <a:xfrm>
-            <a:off x="1261872" y="3877056"/>
-            <a:ext cx="3383280" cy="310896"/>
+          <p:cNvPr id="21" name="Text 19"/>
+          <p:cNvSpPr/>
+          <p:nvPr/>
+        </p:nvSpPr>
+        <p:spPr>
+          <a:xfrm>
+            <a:off x="1261872" y="4462272"/>
+            <a:ext cx="3383280" cy="292608"/>
           </a:xfrm>
           <a:prstGeom prst="rect">
             <a:avLst/>
@@ -6509,13 +6668,13 @@
       </p:sp>
       <p:sp>
         <p:nvSpPr>
-          <p:cNvPr id="17" name="Text 15"/>
-          <p:cNvSpPr/>
-          <p:nvPr/>
-        </p:nvSpPr>
-        <p:spPr>
-          <a:xfrm>
-            <a:off x="1261872" y="4206240"/>
+          <p:cNvPr id="22" name="Text 20"/>
+          <p:cNvSpPr/>
+          <p:nvPr/>
+        </p:nvSpPr>
+        <p:spPr>
+          <a:xfrm>
+            <a:off x="1261872" y="4773168"/>
             <a:ext cx="3383280" cy="274320"/>
           </a:xfrm>
           <a:prstGeom prst="rect">
@@ -6548,14 +6707,14 @@
       </p:sp>
       <p:sp>
         <p:nvSpPr>
-          <p:cNvPr id="18" name="Text 16"/>
-          <p:cNvSpPr/>
-          <p:nvPr/>
-        </p:nvSpPr>
-        <p:spPr>
-          <a:xfrm>
-            <a:off x="4846320" y="3895344"/>
-            <a:ext cx="6309360" cy="685800"/>
+          <p:cNvPr id="23" name="Text 21"/>
+          <p:cNvSpPr/>
+          <p:nvPr/>
+        </p:nvSpPr>
+        <p:spPr>
+          <a:xfrm>
+            <a:off x="4846320" y="4471416"/>
+            <a:ext cx="6309360" cy="640080"/>
           </a:xfrm>
           <a:prstGeom prst="rect">
             <a:avLst/>
@@ -6587,18 +6746,18 @@
       </p:sp>
       <p:sp>
         <p:nvSpPr>
-          <p:cNvPr id="19" name="Shape 17"/>
-          <p:cNvSpPr/>
-          <p:nvPr/>
-        </p:nvSpPr>
-        <p:spPr>
-          <a:xfrm>
-            <a:off x="640080" y="4809744"/>
-            <a:ext cx="10881360" cy="932688"/>
+          <p:cNvPr id="24" name="Shape 22"/>
+          <p:cNvSpPr/>
+          <p:nvPr/>
+        </p:nvSpPr>
+        <p:spPr>
+          <a:xfrm>
+            <a:off x="640080" y="5303520"/>
+            <a:ext cx="10881360" cy="822960"/>
           </a:xfrm>
           <a:prstGeom prst="roundRect">
             <a:avLst>
-              <a:gd name="adj" fmla="val 7843"/>
+              <a:gd name="adj" fmla="val 8889"/>
             </a:avLst>
           </a:prstGeom>
           <a:solidFill>
@@ -6609,13 +6768,13 @@
       </p:sp>
       <p:sp>
         <p:nvSpPr>
-          <p:cNvPr id="20" name="Shape 18"/>
-          <p:cNvSpPr/>
-          <p:nvPr/>
-        </p:nvSpPr>
-        <p:spPr>
-          <a:xfrm>
-            <a:off x="932688" y="5193792"/>
+          <p:cNvPr id="25" name="Shape 23"/>
+          <p:cNvSpPr/>
+          <p:nvPr/>
+        </p:nvSpPr>
+        <p:spPr>
+          <a:xfrm>
+            <a:off x="932688" y="5632704"/>
             <a:ext cx="164592" cy="164592"/>
           </a:xfrm>
           <a:prstGeom prst="ellipse">
@@ -6629,14 +6788,14 @@
       </p:sp>
       <p:sp>
         <p:nvSpPr>
-          <p:cNvPr id="21" name="Text 19"/>
-          <p:cNvSpPr/>
-          <p:nvPr/>
-        </p:nvSpPr>
-        <p:spPr>
-          <a:xfrm>
-            <a:off x="1261872" y="4937760"/>
-            <a:ext cx="3383280" cy="310896"/>
+          <p:cNvPr id="26" name="Text 24"/>
+          <p:cNvSpPr/>
+          <p:nvPr/>
+        </p:nvSpPr>
+        <p:spPr>
+          <a:xfrm>
+            <a:off x="1261872" y="5394960"/>
+            <a:ext cx="3383280" cy="292608"/>
           </a:xfrm>
           <a:prstGeom prst="rect">
             <a:avLst/>
@@ -6668,13 +6827,13 @@
       </p:sp>
       <p:sp>
         <p:nvSpPr>
-          <p:cNvPr id="22" name="Text 20"/>
-          <p:cNvSpPr/>
-          <p:nvPr/>
-        </p:nvSpPr>
-        <p:spPr>
-          <a:xfrm>
-            <a:off x="1261872" y="5266944"/>
+          <p:cNvPr id="27" name="Text 25"/>
+          <p:cNvSpPr/>
+          <p:nvPr/>
+        </p:nvSpPr>
+        <p:spPr>
+          <a:xfrm>
+            <a:off x="1261872" y="5705856"/>
             <a:ext cx="3383280" cy="274320"/>
           </a:xfrm>
           <a:prstGeom prst="rect">
@@ -6707,14 +6866,14 @@
       </p:sp>
       <p:sp>
         <p:nvSpPr>
-          <p:cNvPr id="23" name="Text 21"/>
-          <p:cNvSpPr/>
-          <p:nvPr/>
-        </p:nvSpPr>
-        <p:spPr>
-          <a:xfrm>
-            <a:off x="4846320" y="4956048"/>
-            <a:ext cx="6309360" cy="685800"/>
+          <p:cNvPr id="28" name="Text 26"/>
+          <p:cNvSpPr/>
+          <p:nvPr/>
+        </p:nvSpPr>
+        <p:spPr>
+          <a:xfrm>
+            <a:off x="4846320" y="5404104"/>
+            <a:ext cx="6309360" cy="640080"/>
           </a:xfrm>
           <a:prstGeom prst="rect">
             <a:avLst/>
@@ -6746,13 +6905,13 @@
       </p:sp>
       <p:sp>
         <p:nvSpPr>
-          <p:cNvPr id="24" name="Text 22"/>
-          <p:cNvSpPr/>
-          <p:nvPr/>
-        </p:nvSpPr>
-        <p:spPr>
-          <a:xfrm>
-            <a:off x="640080" y="5989320"/>
+          <p:cNvPr id="29" name="Text 27"/>
+          <p:cNvSpPr/>
+          <p:nvPr/>
+        </p:nvSpPr>
+        <p:spPr>
+          <a:xfrm>
+            <a:off x="640080" y="6291072"/>
             <a:ext cx="10881360" cy="365760"/>
           </a:xfrm>
           <a:prstGeom prst="rect">
